--- a/dist/초5/수학/도형과측정/초5_수학_도형과측정_06_직사각형의넓이.pptx
+++ b/dist/초5/수학/도형과측정/초5_수학_도형과측정_06_직사각형의넓이.pptx
@@ -121,13 +121,13 @@
   <p:extLst>
     <p:ext uri="{521415D9-36F7-43E2-AB2F-B90AF26B5E84}">
       <p14:sectionLst xmlns:p14="http://schemas.microsoft.com/office/powerpoint/2010/main">
-        <p14:section name="도입" id="{f979407a-88e3-7b8c-4fa0-b87bd233dc81}">
+        <p14:section name="도입" id="{ae486197-3afb-a689-bf85-b7b217361d84}">
           <p14:sldIdLst>
             <p14:sldId id="256"/>
             <p14:sldId id="257"/>
           </p14:sldIdLst>
         </p14:section>
-        <p14:section name="개념" id="{0e20ae4c-d83c-5e31-4a6c-27469c497578}">
+        <p14:section name="개념" id="{f48c95e9-5726-f0b5-a8f4-de3639d3c1c7}">
           <p14:sldIdLst>
             <p14:sldId id="258"/>
             <p14:sldId id="259"/>
@@ -135,7 +135,7 @@
             <p14:sldId id="263"/>
           </p14:sldIdLst>
         </p14:section>
-        <p14:section name="연습" id="{bb63c5e0-2875-eb43-64f2-8b2a5d125c71}">
+        <p14:section name="연습" id="{93ab1cc5-8c08-c38d-42de-6f8da9d47071}">
           <p14:sldIdLst>
             <p14:sldId id="261"/>
             <p14:sldId id="262"/>
@@ -143,25 +143,25 @@
             <p14:sldId id="265"/>
           </p14:sldIdLst>
         </p14:section>
-        <p14:section name="개념" id="{d99d2d8d-a4c8-ee9e-2d28-7cbf8dd11105}">
+        <p14:section name="개념" id="{195baaf1-8207-00ef-c96c-f2936db8351f}">
           <p14:sldIdLst/>
         </p14:section>
-        <p14:section name="연습" id="{02aedece-d7b3-39d8-b39d-769c91e7382a}">
+        <p14:section name="연습" id="{3d7a7287-f815-e8ac-cee2-dc7b1f2456ee}">
           <p14:sldIdLst/>
         </p14:section>
-        <p14:section name="확인" id="{57dc8019-7ced-c8b1-50e6-655b846b6c4f}">
+        <p14:section name="확인" id="{7b545054-57d8-0020-aa80-e39616c455e4}">
           <p14:sldIdLst>
             <p14:sldId id="266"/>
             <p14:sldId id="267"/>
             <p14:sldId id="268"/>
           </p14:sldIdLst>
         </p14:section>
-        <p14:section name="정리" id="{634fac5d-1c73-3b6b-2430-27a976d204a4}">
+        <p14:section name="정리" id="{e7bd783d-8ac2-0f34-aeff-bb9b83ed32c2}">
           <p14:sldIdLst>
             <p14:sldId id="269"/>
           </p14:sldIdLst>
         </p14:section>
-        <p14:section name="보충" id="{c3b966f4-4d34-f76f-26dd-bc43efd6b14d}">
+        <p14:section name="보충" id="{0e21237b-1793-8120-3823-a975cb96d449}">
           <p14:sldIdLst>
             <p14:sldId id="270"/>
           </p14:sldIdLst>
@@ -5411,7 +5411,7 @@
                 <a:ea typeface="맑은 고딕" pitchFamily="34" charset="-122"/>
                 <a:cs typeface="맑은 고딕" pitchFamily="34" charset="-120"/>
               </a:rPr>
-              <a:t>1 m² = 100 cm²로 봄</a:t>
+              <a:t>1 m²를 100 cm²로</a:t>
             </a:r>
             <a:endParaRPr lang="ko-KR" sz="2200" dirty="0"/>
           </a:p>
@@ -6547,19 +6547,19 @@
           </p:nvPr>
         </p:nvGraphicFramePr>
         <p:xfrm>
-          <a:off x="3625596" y="1995932"/>
-          <a:ext cx="4937760" cy="914400"/>
+          <a:off x="1293876" y="2042414"/>
+          <a:ext cx="9601200" cy="914400"/>
         </p:xfrm>
         <a:graphic>
           <a:graphicData uri="http://schemas.openxmlformats.org/drawingml/2006/table">
             <a:tbl>
               <a:tblPr/>
               <a:tblGrid>
-                <a:gridCol w="1086307"/>
-                <a:gridCol w="1382573"/>
-                <a:gridCol w="2468880"/>
+                <a:gridCol w="1920240"/>
+                <a:gridCol w="2400300"/>
+                <a:gridCol w="5280660"/>
               </a:tblGrid>
-              <a:tr h="450596">
+              <a:tr h="512572">
                 <a:tc>
                   <a:txBody>
                     <a:bodyPr/>
@@ -6569,7 +6569,7 @@
                         <a:buNone/>
                       </a:pPr>
                       <a:r>
-                        <a:rPr lang="en-US" sz="2200" b="1" dirty="0">
+                        <a:rPr lang="en-US" sz="2600" b="1" dirty="0">
                           <a:solidFill>
                             <a:srgbClr val="1F2937"/>
                           </a:solidFill>
@@ -6579,7 +6579,7 @@
                         </a:rPr>
                         <a:t>길이</a:t>
                       </a:r>
-                      <a:endParaRPr lang="en-US" sz="2200" dirty="0">
+                      <a:endParaRPr lang="en-US" sz="2600" dirty="0">
                         <a:latin typeface="맑은 고딕" charset="0"/>
                         <a:ea typeface="맑은 고딕" charset="0"/>
                         <a:cs typeface="맑은 고딕" charset="0"/>
@@ -6637,7 +6637,7 @@
                         <a:buNone/>
                       </a:pPr>
                       <a:r>
-                        <a:rPr lang="en-US" sz="2200" b="1" dirty="0">
+                        <a:rPr lang="en-US" sz="2600" b="1" dirty="0">
                           <a:solidFill>
                             <a:srgbClr val="1F2937"/>
                           </a:solidFill>
@@ -6647,7 +6647,7 @@
                         </a:rPr>
                         <a:t>같은 길이</a:t>
                       </a:r>
-                      <a:endParaRPr lang="en-US" sz="2200" dirty="0">
+                      <a:endParaRPr lang="en-US" sz="2600" dirty="0">
                         <a:latin typeface="맑은 고딕" charset="0"/>
                         <a:ea typeface="맑은 고딕" charset="0"/>
                         <a:cs typeface="맑은 고딕" charset="0"/>
@@ -6705,7 +6705,7 @@
                         <a:buNone/>
                       </a:pPr>
                       <a:r>
-                        <a:rPr lang="en-US" sz="2200" b="1" dirty="0">
+                        <a:rPr lang="en-US" sz="2600" b="1" dirty="0">
                           <a:solidFill>
                             <a:srgbClr val="1F2937"/>
                           </a:solidFill>
@@ -6715,7 +6715,7 @@
                         </a:rPr>
                         <a:t>기억하기</a:t>
                       </a:r>
-                      <a:endParaRPr lang="en-US" sz="2200" dirty="0">
+                      <a:endParaRPr lang="en-US" sz="2600" dirty="0">
                         <a:latin typeface="맑은 고딕" charset="0"/>
                         <a:ea typeface="맑은 고딕" charset="0"/>
                         <a:cs typeface="맑은 고딕" charset="0"/>
@@ -6765,7 +6765,7 @@
                   </a:tcPr>
                 </a:tc>
               </a:tr>
-              <a:tr h="791464">
+              <a:tr h="512572">
                 <a:tc>
                   <a:txBody>
                     <a:bodyPr/>
@@ -6775,7 +6775,7 @@
                         <a:buNone/>
                       </a:pPr>
                       <a:r>
-                        <a:rPr lang="en-US" sz="2200" dirty="0">
+                        <a:rPr lang="en-US" sz="2600" dirty="0">
                           <a:solidFill>
                             <a:srgbClr val="1F2937"/>
                           </a:solidFill>
@@ -6785,7 +6785,7 @@
                         </a:rPr>
                         <a:t>1 cm</a:t>
                       </a:r>
-                      <a:endParaRPr lang="en-US" sz="2200" dirty="0">
+                      <a:endParaRPr lang="en-US" sz="2600" dirty="0">
                         <a:latin typeface="맑은 고딕" charset="0"/>
                         <a:ea typeface="맑은 고딕" charset="0"/>
                         <a:cs typeface="맑은 고딕" charset="0"/>
@@ -6843,7 +6843,7 @@
                         <a:buNone/>
                       </a:pPr>
                       <a:r>
-                        <a:rPr lang="en-US" sz="2200" dirty="0">
+                        <a:rPr lang="en-US" sz="2600" dirty="0">
                           <a:solidFill>
                             <a:srgbClr val="1F2937"/>
                           </a:solidFill>
@@ -6853,7 +6853,7 @@
                         </a:rPr>
                         <a:t>10 mm</a:t>
                       </a:r>
-                      <a:endParaRPr lang="en-US" sz="2200" dirty="0">
+                      <a:endParaRPr lang="en-US" sz="2600" dirty="0">
                         <a:latin typeface="맑은 고딕" charset="0"/>
                         <a:ea typeface="맑은 고딕" charset="0"/>
                         <a:cs typeface="맑은 고딕" charset="0"/>
@@ -6911,7 +6911,7 @@
                         <a:buNone/>
                       </a:pPr>
                       <a:r>
-                        <a:rPr lang="en-US" sz="2200" dirty="0">
+                        <a:rPr lang="en-US" sz="2600" dirty="0">
                           <a:solidFill>
                             <a:srgbClr val="1F2937"/>
                           </a:solidFill>
@@ -6921,7 +6921,7 @@
                         </a:rPr>
                         <a:t>자의 작은 눈금 10칸</a:t>
                       </a:r>
-                      <a:endParaRPr lang="en-US" sz="2200" dirty="0">
+                      <a:endParaRPr lang="en-US" sz="2600" dirty="0">
                         <a:latin typeface="맑은 고딕" charset="0"/>
                         <a:ea typeface="맑은 고딕" charset="0"/>
                         <a:cs typeface="맑은 고딕" charset="0"/>
@@ -6971,7 +6971,7 @@
                   </a:tcPr>
                 </a:tc>
               </a:tr>
-              <a:tr h="450596">
+              <a:tr h="512572">
                 <a:tc>
                   <a:txBody>
                     <a:bodyPr/>
@@ -6981,7 +6981,7 @@
                         <a:buNone/>
                       </a:pPr>
                       <a:r>
-                        <a:rPr lang="en-US" sz="2200" dirty="0">
+                        <a:rPr lang="en-US" sz="2600" dirty="0">
                           <a:solidFill>
                             <a:srgbClr val="1F2937"/>
                           </a:solidFill>
@@ -6991,7 +6991,7 @@
                         </a:rPr>
                         <a:t>1 m</a:t>
                       </a:r>
-                      <a:endParaRPr lang="en-US" sz="2200" dirty="0">
+                      <a:endParaRPr lang="en-US" sz="2600" dirty="0">
                         <a:latin typeface="맑은 고딕" charset="0"/>
                         <a:ea typeface="맑은 고딕" charset="0"/>
                         <a:cs typeface="맑은 고딕" charset="0"/>
@@ -7049,7 +7049,7 @@
                         <a:buNone/>
                       </a:pPr>
                       <a:r>
-                        <a:rPr lang="en-US" sz="2200" dirty="0">
+                        <a:rPr lang="en-US" sz="2600" dirty="0">
                           <a:solidFill>
                             <a:srgbClr val="1F2937"/>
                           </a:solidFill>
@@ -7059,7 +7059,7 @@
                         </a:rPr>
                         <a:t>100 cm</a:t>
                       </a:r>
-                      <a:endParaRPr lang="en-US" sz="2200" dirty="0">
+                      <a:endParaRPr lang="en-US" sz="2600" dirty="0">
                         <a:latin typeface="맑은 고딕" charset="0"/>
                         <a:ea typeface="맑은 고딕" charset="0"/>
                         <a:cs typeface="맑은 고딕" charset="0"/>
@@ -7117,7 +7117,7 @@
                         <a:buNone/>
                       </a:pPr>
                       <a:r>
-                        <a:rPr lang="en-US" sz="2200" dirty="0">
+                        <a:rPr lang="en-US" sz="2600" dirty="0">
                           <a:solidFill>
                             <a:srgbClr val="1F2937"/>
                           </a:solidFill>
@@ -7127,7 +7127,7 @@
                         </a:rPr>
                         <a:t>양팔을 벌린 길이쯤</a:t>
                       </a:r>
-                      <a:endParaRPr lang="en-US" sz="2200" dirty="0">
+                      <a:endParaRPr lang="en-US" sz="2600" dirty="0">
                         <a:latin typeface="맑은 고딕" charset="0"/>
                         <a:ea typeface="맑은 고딕" charset="0"/>
                         <a:cs typeface="맑은 고딕" charset="0"/>
@@ -7177,7 +7177,7 @@
                   </a:tcPr>
                 </a:tc>
               </a:tr>
-              <a:tr h="450596">
+              <a:tr h="512572">
                 <a:tc>
                   <a:txBody>
                     <a:bodyPr/>
@@ -7187,7 +7187,7 @@
                         <a:buNone/>
                       </a:pPr>
                       <a:r>
-                        <a:rPr lang="en-US" sz="2200" dirty="0">
+                        <a:rPr lang="en-US" sz="2600" dirty="0">
                           <a:solidFill>
                             <a:srgbClr val="1F2937"/>
                           </a:solidFill>
@@ -7197,7 +7197,7 @@
                         </a:rPr>
                         <a:t>1 km</a:t>
                       </a:r>
-                      <a:endParaRPr lang="en-US" sz="2200" dirty="0">
+                      <a:endParaRPr lang="en-US" sz="2600" dirty="0">
                         <a:latin typeface="맑은 고딕" charset="0"/>
                         <a:ea typeface="맑은 고딕" charset="0"/>
                         <a:cs typeface="맑은 고딕" charset="0"/>
@@ -7255,7 +7255,7 @@
                         <a:buNone/>
                       </a:pPr>
                       <a:r>
-                        <a:rPr lang="en-US" sz="2200" dirty="0">
+                        <a:rPr lang="en-US" sz="2600" dirty="0">
                           <a:solidFill>
                             <a:srgbClr val="1F2937"/>
                           </a:solidFill>
@@ -7265,7 +7265,7 @@
                         </a:rPr>
                         <a:t>1000 m</a:t>
                       </a:r>
-                      <a:endParaRPr lang="en-US" sz="2200" dirty="0">
+                      <a:endParaRPr lang="en-US" sz="2600" dirty="0">
                         <a:latin typeface="맑은 고딕" charset="0"/>
                         <a:ea typeface="맑은 고딕" charset="0"/>
                         <a:cs typeface="맑은 고딕" charset="0"/>
@@ -7323,7 +7323,7 @@
                         <a:buNone/>
                       </a:pPr>
                       <a:r>
-                        <a:rPr lang="en-US" sz="2200" dirty="0">
+                        <a:rPr lang="en-US" sz="2600" dirty="0">
                           <a:solidFill>
                             <a:srgbClr val="1F2937"/>
                           </a:solidFill>
@@ -7333,7 +7333,7 @@
                         </a:rPr>
                         <a:t>걸어서 15분쯤</a:t>
                       </a:r>
-                      <a:endParaRPr lang="en-US" sz="2200" dirty="0">
+                      <a:endParaRPr lang="en-US" sz="2600" dirty="0">
                         <a:latin typeface="맑은 고딕" charset="0"/>
                         <a:ea typeface="맑은 고딕" charset="0"/>
                         <a:cs typeface="맑은 고딕" charset="0"/>
@@ -8059,7 +8059,7 @@
                 <a:ea typeface="맑은 고딕" pitchFamily="34" charset="-122"/>
                 <a:cs typeface="맑은 고딕" pitchFamily="34" charset="-120"/>
               </a:rPr>
-              <a:t>한 변이 1 cm인 정사각형의 넓이, ‘1 제곱센티미터’라고 읽어요.</a:t>
+              <a:t>한 변이 1 cm인 정사각형의 넓이, ‘1 제곱센티미터’라고 읽어요.</a:t>
             </a:r>
             <a:endParaRPr lang="ko-KR" sz="2800" dirty="0"/>
           </a:p>
@@ -8162,8 +8162,8 @@
         </p:nvSpPr>
         <p:spPr>
           <a:xfrm>
-            <a:off x="3012948" y="2443353"/>
-            <a:ext cx="457200" cy="457200"/>
+            <a:off x="2990088" y="2420493"/>
+            <a:ext cx="502920" cy="502920"/>
           </a:xfrm>
           <a:custGeom>
             <a:avLst/>
@@ -8172,15 +8172,15 @@
             <a:cxnLst/>
             <a:rect l="l" t="t" r="r" b="b"/>
             <a:pathLst>
-              <a:path w="457200" h="457200">
+              <a:path w="502920" h="502920">
                 <a:moveTo>
-                  <a:pt x="0" y="457200"/>
+                  <a:pt x="0" y="502920"/>
                 </a:moveTo>
                 <a:lnTo>
-                  <a:pt x="457200" y="457200"/>
+                  <a:pt x="502920" y="502920"/>
                 </a:lnTo>
                 <a:lnTo>
-                  <a:pt x="457200" y="0"/>
+                  <a:pt x="502920" y="0"/>
                 </a:lnTo>
                 <a:lnTo>
                   <a:pt x="0" y="0"/>
@@ -8208,7 +8208,7 @@
         </p:nvSpPr>
         <p:spPr>
           <a:xfrm>
-            <a:off x="2859786" y="2474468"/>
+            <a:off x="2859786" y="3000248"/>
             <a:ext cx="763524" cy="349250"/>
           </a:xfrm>
           <a:prstGeom prst="rect">
@@ -8247,7 +8247,7 @@
         </p:nvSpPr>
         <p:spPr>
           <a:xfrm>
-            <a:off x="3061462" y="2497328"/>
+            <a:off x="2178050" y="2497328"/>
             <a:ext cx="763524" cy="349250"/>
           </a:xfrm>
           <a:prstGeom prst="rect">
@@ -8325,8 +8325,8 @@
         </p:nvSpPr>
         <p:spPr>
           <a:xfrm>
-            <a:off x="8033004" y="1986153"/>
-            <a:ext cx="1828800" cy="1371600"/>
+            <a:off x="7941564" y="1917573"/>
+            <a:ext cx="2011680" cy="1508760"/>
           </a:xfrm>
           <a:custGeom>
             <a:avLst/>
@@ -8335,15 +8335,15 @@
             <a:cxnLst/>
             <a:rect l="l" t="t" r="r" b="b"/>
             <a:pathLst>
-              <a:path w="1828800" h="1371600">
+              <a:path w="2011680" h="1508760">
                 <a:moveTo>
-                  <a:pt x="0" y="1371600"/>
+                  <a:pt x="0" y="1508760"/>
                 </a:moveTo>
                 <a:lnTo>
-                  <a:pt x="1828800" y="1371600"/>
+                  <a:pt x="2011680" y="1508760"/>
                 </a:lnTo>
                 <a:lnTo>
-                  <a:pt x="1828800" y="0"/>
+                  <a:pt x="2011680" y="0"/>
                 </a:lnTo>
                 <a:lnTo>
                   <a:pt x="0" y="0"/>
@@ -8366,8 +8366,8 @@
         </p:nvSpPr>
         <p:spPr>
           <a:xfrm flipV="1">
-            <a:off x="7575804" y="1528953"/>
-            <a:ext cx="0" cy="2286000"/>
+            <a:off x="7438644" y="1414653"/>
+            <a:ext cx="0" cy="2514600"/>
           </a:xfrm>
           <a:prstGeom prst="line">
             <a:avLst/>
@@ -8389,8 +8389,8 @@
         </p:nvSpPr>
         <p:spPr>
           <a:xfrm flipV="1">
-            <a:off x="8033004" y="1528953"/>
-            <a:ext cx="0" cy="2286000"/>
+            <a:off x="7941564" y="1414653"/>
+            <a:ext cx="0" cy="2514600"/>
           </a:xfrm>
           <a:prstGeom prst="line">
             <a:avLst/>
@@ -8412,8 +8412,8 @@
         </p:nvSpPr>
         <p:spPr>
           <a:xfrm flipV="1">
-            <a:off x="8490204" y="1528953"/>
-            <a:ext cx="0" cy="2286000"/>
+            <a:off x="8444484" y="1414653"/>
+            <a:ext cx="0" cy="2514600"/>
           </a:xfrm>
           <a:prstGeom prst="line">
             <a:avLst/>
@@ -8435,8 +8435,8 @@
         </p:nvSpPr>
         <p:spPr>
           <a:xfrm flipV="1">
-            <a:off x="8947404" y="1528953"/>
-            <a:ext cx="0" cy="2286000"/>
+            <a:off x="8947404" y="1414653"/>
+            <a:ext cx="0" cy="2514600"/>
           </a:xfrm>
           <a:prstGeom prst="line">
             <a:avLst/>
@@ -8458,8 +8458,8 @@
         </p:nvSpPr>
         <p:spPr>
           <a:xfrm flipV="1">
-            <a:off x="9404604" y="1528953"/>
-            <a:ext cx="0" cy="2286000"/>
+            <a:off x="9450324" y="1414653"/>
+            <a:ext cx="0" cy="2514600"/>
           </a:xfrm>
           <a:prstGeom prst="line">
             <a:avLst/>
@@ -8481,8 +8481,8 @@
         </p:nvSpPr>
         <p:spPr>
           <a:xfrm flipV="1">
-            <a:off x="9861804" y="1528953"/>
-            <a:ext cx="0" cy="2286000"/>
+            <a:off x="9953244" y="1414653"/>
+            <a:ext cx="0" cy="2514600"/>
           </a:xfrm>
           <a:prstGeom prst="line">
             <a:avLst/>
@@ -8504,8 +8504,8 @@
         </p:nvSpPr>
         <p:spPr>
           <a:xfrm flipV="1">
-            <a:off x="10319004" y="1528953"/>
-            <a:ext cx="0" cy="2286000"/>
+            <a:off x="10456164" y="1414653"/>
+            <a:ext cx="0" cy="2514600"/>
           </a:xfrm>
           <a:prstGeom prst="line">
             <a:avLst/>
@@ -8527,8 +8527,8 @@
         </p:nvSpPr>
         <p:spPr>
           <a:xfrm>
-            <a:off x="7575804" y="3814953"/>
-            <a:ext cx="2743200" cy="0"/>
+            <a:off x="7438644" y="3929253"/>
+            <a:ext cx="3017520" cy="0"/>
           </a:xfrm>
           <a:prstGeom prst="line">
             <a:avLst/>
@@ -8550,8 +8550,8 @@
         </p:nvSpPr>
         <p:spPr>
           <a:xfrm>
-            <a:off x="7575804" y="3357753"/>
-            <a:ext cx="2743200" cy="0"/>
+            <a:off x="7438644" y="3426333"/>
+            <a:ext cx="3017520" cy="0"/>
           </a:xfrm>
           <a:prstGeom prst="line">
             <a:avLst/>
@@ -8573,8 +8573,8 @@
         </p:nvSpPr>
         <p:spPr>
           <a:xfrm>
-            <a:off x="7575804" y="2900553"/>
-            <a:ext cx="2743200" cy="0"/>
+            <a:off x="7438644" y="2923413"/>
+            <a:ext cx="3017520" cy="0"/>
           </a:xfrm>
           <a:prstGeom prst="line">
             <a:avLst/>
@@ -8596,8 +8596,8 @@
         </p:nvSpPr>
         <p:spPr>
           <a:xfrm>
-            <a:off x="7575804" y="2443353"/>
-            <a:ext cx="2743200" cy="0"/>
+            <a:off x="7438644" y="2420493"/>
+            <a:ext cx="3017520" cy="0"/>
           </a:xfrm>
           <a:prstGeom prst="line">
             <a:avLst/>
@@ -8619,8 +8619,8 @@
         </p:nvSpPr>
         <p:spPr>
           <a:xfrm>
-            <a:off x="7575804" y="1986153"/>
-            <a:ext cx="2743200" cy="0"/>
+            <a:off x="7438644" y="1917573"/>
+            <a:ext cx="3017520" cy="0"/>
           </a:xfrm>
           <a:prstGeom prst="line">
             <a:avLst/>
@@ -8642,8 +8642,8 @@
         </p:nvSpPr>
         <p:spPr>
           <a:xfrm>
-            <a:off x="7575804" y="1528953"/>
-            <a:ext cx="2743200" cy="0"/>
+            <a:off x="7438644" y="1414653"/>
+            <a:ext cx="3017520" cy="0"/>
           </a:xfrm>
           <a:prstGeom prst="line">
             <a:avLst/>
@@ -8665,8 +8665,8 @@
         </p:nvSpPr>
         <p:spPr>
           <a:xfrm>
-            <a:off x="8033004" y="1986153"/>
-            <a:ext cx="1828800" cy="1371600"/>
+            <a:off x="7941564" y="1917573"/>
+            <a:ext cx="2011680" cy="1508760"/>
           </a:xfrm>
           <a:custGeom>
             <a:avLst/>
@@ -8675,15 +8675,15 @@
             <a:cxnLst/>
             <a:rect l="l" t="t" r="r" b="b"/>
             <a:pathLst>
-              <a:path w="1828800" h="1371600">
+              <a:path w="2011680" h="1508760">
                 <a:moveTo>
-                  <a:pt x="0" y="1371600"/>
+                  <a:pt x="0" y="1508760"/>
                 </a:moveTo>
                 <a:lnTo>
-                  <a:pt x="1828800" y="1371600"/>
+                  <a:pt x="2011680" y="1508760"/>
                 </a:lnTo>
                 <a:lnTo>
-                  <a:pt x="1828800" y="0"/>
+                  <a:pt x="2011680" y="0"/>
                 </a:lnTo>
                 <a:lnTo>
                   <a:pt x="0" y="0"/>
@@ -8931,8 +8931,8 @@
         </p:nvSpPr>
         <p:spPr>
           <a:xfrm>
-            <a:off x="7909011" y="2400300"/>
-            <a:ext cx="2743200" cy="1645920"/>
+            <a:off x="7952743" y="2426539"/>
+            <a:ext cx="2655737" cy="1593442"/>
           </a:xfrm>
           <a:custGeom>
             <a:avLst/>
@@ -8941,15 +8941,15 @@
             <a:cxnLst/>
             <a:rect l="l" t="t" r="r" b="b"/>
             <a:pathLst>
-              <a:path w="2743200" h="1645920">
+              <a:path w="2655737" h="1593442">
                 <a:moveTo>
-                  <a:pt x="0" y="1645920"/>
+                  <a:pt x="0" y="1593442"/>
                 </a:moveTo>
                 <a:lnTo>
-                  <a:pt x="2743200" y="1645920"/>
+                  <a:pt x="2655737" y="1593442"/>
                 </a:lnTo>
                 <a:lnTo>
-                  <a:pt x="2743200" y="0"/>
+                  <a:pt x="2655737" y="0"/>
                 </a:lnTo>
                 <a:lnTo>
                   <a:pt x="0" y="0"/>
@@ -8972,8 +8972,8 @@
         </p:nvSpPr>
         <p:spPr>
           <a:xfrm flipV="1">
-            <a:off x="7360371" y="1851660"/>
-            <a:ext cx="0" cy="2743200"/>
+            <a:off x="7421596" y="1895392"/>
+            <a:ext cx="0" cy="2655737"/>
           </a:xfrm>
           <a:prstGeom prst="line">
             <a:avLst/>
@@ -8995,8 +8995,8 @@
         </p:nvSpPr>
         <p:spPr>
           <a:xfrm flipV="1">
-            <a:off x="7909011" y="1851660"/>
-            <a:ext cx="0" cy="2743200"/>
+            <a:off x="7952743" y="1895392"/>
+            <a:ext cx="0" cy="2655737"/>
           </a:xfrm>
           <a:prstGeom prst="line">
             <a:avLst/>
@@ -9018,8 +9018,8 @@
         </p:nvSpPr>
         <p:spPr>
           <a:xfrm flipV="1">
-            <a:off x="8457651" y="1851660"/>
-            <a:ext cx="0" cy="2743200"/>
+            <a:off x="8483890" y="1895392"/>
+            <a:ext cx="0" cy="2655737"/>
           </a:xfrm>
           <a:prstGeom prst="line">
             <a:avLst/>
@@ -9041,8 +9041,8 @@
         </p:nvSpPr>
         <p:spPr>
           <a:xfrm flipV="1">
-            <a:off x="9006291" y="1851660"/>
-            <a:ext cx="0" cy="2743200"/>
+            <a:off x="9015038" y="1895392"/>
+            <a:ext cx="0" cy="2655737"/>
           </a:xfrm>
           <a:prstGeom prst="line">
             <a:avLst/>
@@ -9064,8 +9064,8 @@
         </p:nvSpPr>
         <p:spPr>
           <a:xfrm flipV="1">
-            <a:off x="9554931" y="1851660"/>
-            <a:ext cx="0" cy="2743200"/>
+            <a:off x="9546185" y="1895392"/>
+            <a:ext cx="0" cy="2655737"/>
           </a:xfrm>
           <a:prstGeom prst="line">
             <a:avLst/>
@@ -9087,8 +9087,8 @@
         </p:nvSpPr>
         <p:spPr>
           <a:xfrm flipV="1">
-            <a:off x="10103571" y="1851660"/>
-            <a:ext cx="0" cy="2743200"/>
+            <a:off x="10077332" y="1895392"/>
+            <a:ext cx="0" cy="2655737"/>
           </a:xfrm>
           <a:prstGeom prst="line">
             <a:avLst/>
@@ -9110,8 +9110,8 @@
         </p:nvSpPr>
         <p:spPr>
           <a:xfrm flipV="1">
-            <a:off x="10652211" y="1851660"/>
-            <a:ext cx="0" cy="2743200"/>
+            <a:off x="10608480" y="1895392"/>
+            <a:ext cx="0" cy="2655737"/>
           </a:xfrm>
           <a:prstGeom prst="line">
             <a:avLst/>
@@ -9133,8 +9133,8 @@
         </p:nvSpPr>
         <p:spPr>
           <a:xfrm flipV="1">
-            <a:off x="11200851" y="1851660"/>
-            <a:ext cx="0" cy="2743200"/>
+            <a:off x="11139627" y="1895392"/>
+            <a:ext cx="0" cy="2655737"/>
           </a:xfrm>
           <a:prstGeom prst="line">
             <a:avLst/>
@@ -9156,8 +9156,8 @@
         </p:nvSpPr>
         <p:spPr>
           <a:xfrm>
-            <a:off x="7360371" y="4594860"/>
-            <a:ext cx="3840480" cy="0"/>
+            <a:off x="7421596" y="4551128"/>
+            <a:ext cx="3718032" cy="0"/>
           </a:xfrm>
           <a:prstGeom prst="line">
             <a:avLst/>
@@ -9179,8 +9179,8 @@
         </p:nvSpPr>
         <p:spPr>
           <a:xfrm>
-            <a:off x="7360371" y="4046220"/>
-            <a:ext cx="3840480" cy="0"/>
+            <a:off x="7421596" y="4019981"/>
+            <a:ext cx="3718032" cy="0"/>
           </a:xfrm>
           <a:prstGeom prst="line">
             <a:avLst/>
@@ -9202,8 +9202,8 @@
         </p:nvSpPr>
         <p:spPr>
           <a:xfrm>
-            <a:off x="7360371" y="3497580"/>
-            <a:ext cx="3840480" cy="0"/>
+            <a:off x="7421596" y="3488834"/>
+            <a:ext cx="3718032" cy="0"/>
           </a:xfrm>
           <a:prstGeom prst="line">
             <a:avLst/>
@@ -9225,8 +9225,8 @@
         </p:nvSpPr>
         <p:spPr>
           <a:xfrm>
-            <a:off x="7360371" y="2948940"/>
-            <a:ext cx="3840480" cy="0"/>
+            <a:off x="7421596" y="2957686"/>
+            <a:ext cx="3718032" cy="0"/>
           </a:xfrm>
           <a:prstGeom prst="line">
             <a:avLst/>
@@ -9248,8 +9248,8 @@
         </p:nvSpPr>
         <p:spPr>
           <a:xfrm>
-            <a:off x="7360371" y="2400300"/>
-            <a:ext cx="3840480" cy="0"/>
+            <a:off x="7421596" y="2426539"/>
+            <a:ext cx="3718032" cy="0"/>
           </a:xfrm>
           <a:prstGeom prst="line">
             <a:avLst/>
@@ -9271,8 +9271,8 @@
         </p:nvSpPr>
         <p:spPr>
           <a:xfrm>
-            <a:off x="7360371" y="1851660"/>
-            <a:ext cx="3840480" cy="0"/>
+            <a:off x="7421596" y="1895392"/>
+            <a:ext cx="3718032" cy="0"/>
           </a:xfrm>
           <a:prstGeom prst="line">
             <a:avLst/>
@@ -9294,8 +9294,8 @@
         </p:nvSpPr>
         <p:spPr>
           <a:xfrm>
-            <a:off x="7909011" y="2400300"/>
-            <a:ext cx="2743200" cy="1645920"/>
+            <a:off x="7952743" y="2426539"/>
+            <a:ext cx="2655737" cy="1593442"/>
           </a:xfrm>
           <a:custGeom>
             <a:avLst/>
@@ -9304,15 +9304,15 @@
             <a:cxnLst/>
             <a:rect l="l" t="t" r="r" b="b"/>
             <a:pathLst>
-              <a:path w="2743200" h="1645920">
+              <a:path w="2655737" h="1593442">
                 <a:moveTo>
-                  <a:pt x="0" y="1645920"/>
+                  <a:pt x="0" y="1593442"/>
                 </a:moveTo>
                 <a:lnTo>
-                  <a:pt x="2743200" y="1645920"/>
+                  <a:pt x="2655737" y="1593442"/>
                 </a:lnTo>
                 <a:lnTo>
-                  <a:pt x="2743200" y="0"/>
+                  <a:pt x="2655737" y="0"/>
                 </a:lnTo>
                 <a:lnTo>
                   <a:pt x="0" y="0"/>
@@ -9338,7 +9338,7 @@
         </p:nvSpPr>
         <p:spPr>
           <a:xfrm>
-            <a:off x="8898849" y="4123055"/>
+            <a:off x="8898849" y="4096816"/>
             <a:ext cx="763524" cy="349250"/>
           </a:xfrm>
           <a:prstGeom prst="rect">
@@ -9377,7 +9377,7 @@
         </p:nvSpPr>
         <p:spPr>
           <a:xfrm>
-            <a:off x="7096973" y="3048635"/>
+            <a:off x="7140705" y="3048635"/>
             <a:ext cx="763524" cy="349250"/>
           </a:xfrm>
           <a:prstGeom prst="rect">
@@ -11108,8 +11108,8 @@
         </p:nvSpPr>
         <p:spPr>
           <a:xfrm>
-            <a:off x="1984248" y="3089529"/>
-            <a:ext cx="2514600" cy="502920"/>
+            <a:off x="2258568" y="3144393"/>
+            <a:ext cx="1965960" cy="393192"/>
           </a:xfrm>
           <a:custGeom>
             <a:avLst/>
@@ -11118,15 +11118,15 @@
             <a:cxnLst/>
             <a:rect l="l" t="t" r="r" b="b"/>
             <a:pathLst>
-              <a:path w="2514600" h="502920">
+              <a:path w="1965960" h="393192">
                 <a:moveTo>
-                  <a:pt x="0" y="502920"/>
+                  <a:pt x="0" y="393192"/>
                 </a:moveTo>
                 <a:lnTo>
-                  <a:pt x="2514600" y="502920"/>
+                  <a:pt x="1965960" y="393192"/>
                 </a:lnTo>
                 <a:lnTo>
-                  <a:pt x="2514600" y="0"/>
+                  <a:pt x="1965960" y="0"/>
                 </a:lnTo>
                 <a:lnTo>
                   <a:pt x="0" y="0"/>
@@ -11149,8 +11149,8 @@
         </p:nvSpPr>
         <p:spPr>
           <a:xfrm flipV="1">
-            <a:off x="1481328" y="2586609"/>
-            <a:ext cx="0" cy="1508760"/>
+            <a:off x="1865376" y="2751201"/>
+            <a:ext cx="0" cy="1179576"/>
           </a:xfrm>
           <a:prstGeom prst="line">
             <a:avLst/>
@@ -11172,8 +11172,8 @@
         </p:nvSpPr>
         <p:spPr>
           <a:xfrm flipV="1">
-            <a:off x="1984248" y="2586609"/>
-            <a:ext cx="0" cy="1508760"/>
+            <a:off x="2258568" y="2751201"/>
+            <a:ext cx="0" cy="1179576"/>
           </a:xfrm>
           <a:prstGeom prst="line">
             <a:avLst/>
@@ -11195,8 +11195,8 @@
         </p:nvSpPr>
         <p:spPr>
           <a:xfrm flipV="1">
-            <a:off x="2487168" y="2586609"/>
-            <a:ext cx="0" cy="1508760"/>
+            <a:off x="2651760" y="2751201"/>
+            <a:ext cx="0" cy="1179576"/>
           </a:xfrm>
           <a:prstGeom prst="line">
             <a:avLst/>
@@ -11218,8 +11218,8 @@
         </p:nvSpPr>
         <p:spPr>
           <a:xfrm flipV="1">
-            <a:off x="2990088" y="2586609"/>
-            <a:ext cx="0" cy="1508760"/>
+            <a:off x="3044952" y="2751201"/>
+            <a:ext cx="0" cy="1179576"/>
           </a:xfrm>
           <a:prstGeom prst="line">
             <a:avLst/>
@@ -11241,8 +11241,8 @@
         </p:nvSpPr>
         <p:spPr>
           <a:xfrm flipV="1">
-            <a:off x="3493008" y="2586609"/>
-            <a:ext cx="0" cy="1508760"/>
+            <a:off x="3438144" y="2751201"/>
+            <a:ext cx="0" cy="1179576"/>
           </a:xfrm>
           <a:prstGeom prst="line">
             <a:avLst/>
@@ -11264,8 +11264,8 @@
         </p:nvSpPr>
         <p:spPr>
           <a:xfrm flipV="1">
-            <a:off x="3995928" y="2586609"/>
-            <a:ext cx="0" cy="1508760"/>
+            <a:off x="3831336" y="2751201"/>
+            <a:ext cx="0" cy="1179576"/>
           </a:xfrm>
           <a:prstGeom prst="line">
             <a:avLst/>
@@ -11287,8 +11287,8 @@
         </p:nvSpPr>
         <p:spPr>
           <a:xfrm flipV="1">
-            <a:off x="4498848" y="2586609"/>
-            <a:ext cx="0" cy="1508760"/>
+            <a:off x="4224528" y="2751201"/>
+            <a:ext cx="0" cy="1179576"/>
           </a:xfrm>
           <a:prstGeom prst="line">
             <a:avLst/>
@@ -11310,8 +11310,8 @@
         </p:nvSpPr>
         <p:spPr>
           <a:xfrm flipV="1">
-            <a:off x="5001768" y="2586609"/>
-            <a:ext cx="0" cy="1508760"/>
+            <a:off x="4617720" y="2751201"/>
+            <a:ext cx="0" cy="1179576"/>
           </a:xfrm>
           <a:prstGeom prst="line">
             <a:avLst/>
@@ -11333,8 +11333,8 @@
         </p:nvSpPr>
         <p:spPr>
           <a:xfrm>
-            <a:off x="1481328" y="4095369"/>
-            <a:ext cx="3520440" cy="0"/>
+            <a:off x="1865376" y="3930777"/>
+            <a:ext cx="2752344" cy="0"/>
           </a:xfrm>
           <a:prstGeom prst="line">
             <a:avLst/>
@@ -11356,8 +11356,8 @@
         </p:nvSpPr>
         <p:spPr>
           <a:xfrm>
-            <a:off x="1481328" y="3592449"/>
-            <a:ext cx="3520440" cy="0"/>
+            <a:off x="1865376" y="3537585"/>
+            <a:ext cx="2752344" cy="0"/>
           </a:xfrm>
           <a:prstGeom prst="line">
             <a:avLst/>
@@ -11379,8 +11379,8 @@
         </p:nvSpPr>
         <p:spPr>
           <a:xfrm>
-            <a:off x="1481328" y="3089529"/>
-            <a:ext cx="3520440" cy="0"/>
+            <a:off x="1865376" y="3144393"/>
+            <a:ext cx="2752344" cy="0"/>
           </a:xfrm>
           <a:prstGeom prst="line">
             <a:avLst/>
@@ -11402,8 +11402,8 @@
         </p:nvSpPr>
         <p:spPr>
           <a:xfrm>
-            <a:off x="1481328" y="2586609"/>
-            <a:ext cx="3520440" cy="0"/>
+            <a:off x="1865376" y="2751201"/>
+            <a:ext cx="2752344" cy="0"/>
           </a:xfrm>
           <a:prstGeom prst="line">
             <a:avLst/>
@@ -11425,8 +11425,8 @@
         </p:nvSpPr>
         <p:spPr>
           <a:xfrm>
-            <a:off x="1984248" y="3089529"/>
-            <a:ext cx="2514600" cy="502920"/>
+            <a:off x="2258568" y="3144393"/>
+            <a:ext cx="1965960" cy="393192"/>
           </a:xfrm>
           <a:custGeom>
             <a:avLst/>
@@ -11435,15 +11435,15 @@
             <a:cxnLst/>
             <a:rect l="l" t="t" r="r" b="b"/>
             <a:pathLst>
-              <a:path w="2514600" h="502920">
+              <a:path w="1965960" h="393192">
                 <a:moveTo>
-                  <a:pt x="0" y="502920"/>
+                  <a:pt x="0" y="393192"/>
                 </a:moveTo>
                 <a:lnTo>
-                  <a:pt x="2514600" y="502920"/>
+                  <a:pt x="1965960" y="393192"/>
                 </a:lnTo>
                 <a:lnTo>
-                  <a:pt x="2514600" y="0"/>
+                  <a:pt x="1965960" y="0"/>
                 </a:lnTo>
                 <a:lnTo>
                   <a:pt x="0" y="0"/>
@@ -11469,7 +11469,7 @@
         </p:nvSpPr>
         <p:spPr>
           <a:xfrm>
-            <a:off x="2859786" y="3166364"/>
+            <a:off x="2859786" y="3614420"/>
             <a:ext cx="763524" cy="349250"/>
           </a:xfrm>
           <a:prstGeom prst="rect">
@@ -11508,7 +11508,7 @@
         </p:nvSpPr>
         <p:spPr>
           <a:xfrm>
-            <a:off x="4547362" y="3166364"/>
+            <a:off x="4273042" y="3166364"/>
             <a:ext cx="763524" cy="349250"/>
           </a:xfrm>
           <a:prstGeom prst="rect">
@@ -11586,8 +11586,8 @@
         </p:nvSpPr>
         <p:spPr>
           <a:xfrm>
-            <a:off x="8350987" y="2744572"/>
-            <a:ext cx="1192835" cy="1192835"/>
+            <a:off x="8450229" y="2843814"/>
+            <a:ext cx="994349" cy="994349"/>
           </a:xfrm>
           <a:custGeom>
             <a:avLst/>
@@ -11596,15 +11596,15 @@
             <a:cxnLst/>
             <a:rect l="l" t="t" r="r" b="b"/>
             <a:pathLst>
-              <a:path w="1192835" h="1192835">
+              <a:path w="994349" h="994349">
                 <a:moveTo>
-                  <a:pt x="0" y="1192835"/>
+                  <a:pt x="0" y="994349"/>
                 </a:moveTo>
                 <a:lnTo>
-                  <a:pt x="1192835" y="1192835"/>
+                  <a:pt x="994349" y="994349"/>
                 </a:lnTo>
                 <a:lnTo>
-                  <a:pt x="1192835" y="0"/>
+                  <a:pt x="994349" y="0"/>
                 </a:lnTo>
                 <a:lnTo>
                   <a:pt x="0" y="0"/>
@@ -11627,8 +11627,8 @@
         </p:nvSpPr>
         <p:spPr>
           <a:xfrm flipV="1">
-            <a:off x="7953375" y="2346960"/>
-            <a:ext cx="0" cy="1988058"/>
+            <a:off x="8118780" y="2512365"/>
+            <a:ext cx="0" cy="1657248"/>
           </a:xfrm>
           <a:prstGeom prst="line">
             <a:avLst/>
@@ -11650,8 +11650,8 @@
         </p:nvSpPr>
         <p:spPr>
           <a:xfrm flipV="1">
-            <a:off x="8350987" y="2346960"/>
-            <a:ext cx="0" cy="1988058"/>
+            <a:off x="8450229" y="2512365"/>
+            <a:ext cx="0" cy="1657248"/>
           </a:xfrm>
           <a:prstGeom prst="line">
             <a:avLst/>
@@ -11673,8 +11673,8 @@
         </p:nvSpPr>
         <p:spPr>
           <a:xfrm flipV="1">
-            <a:off x="8748598" y="2346960"/>
-            <a:ext cx="0" cy="1988058"/>
+            <a:off x="8781679" y="2512365"/>
+            <a:ext cx="0" cy="1657248"/>
           </a:xfrm>
           <a:prstGeom prst="line">
             <a:avLst/>
@@ -11696,8 +11696,8 @@
         </p:nvSpPr>
         <p:spPr>
           <a:xfrm flipV="1">
-            <a:off x="9146210" y="2346960"/>
-            <a:ext cx="0" cy="1988058"/>
+            <a:off x="9113129" y="2512365"/>
+            <a:ext cx="0" cy="1657248"/>
           </a:xfrm>
           <a:prstGeom prst="line">
             <a:avLst/>
@@ -11719,8 +11719,8 @@
         </p:nvSpPr>
         <p:spPr>
           <a:xfrm flipV="1">
-            <a:off x="9543821" y="2346960"/>
-            <a:ext cx="0" cy="1988058"/>
+            <a:off x="9444579" y="2512365"/>
+            <a:ext cx="0" cy="1657248"/>
           </a:xfrm>
           <a:prstGeom prst="line">
             <a:avLst/>
@@ -11742,8 +11742,8 @@
         </p:nvSpPr>
         <p:spPr>
           <a:xfrm flipV="1">
-            <a:off x="9941433" y="2346960"/>
-            <a:ext cx="0" cy="1988058"/>
+            <a:off x="9776028" y="2512365"/>
+            <a:ext cx="0" cy="1657248"/>
           </a:xfrm>
           <a:prstGeom prst="line">
             <a:avLst/>
@@ -11765,8 +11765,8 @@
         </p:nvSpPr>
         <p:spPr>
           <a:xfrm>
-            <a:off x="7953375" y="4335018"/>
-            <a:ext cx="1988058" cy="0"/>
+            <a:off x="8118780" y="4169613"/>
+            <a:ext cx="1657248" cy="0"/>
           </a:xfrm>
           <a:prstGeom prst="line">
             <a:avLst/>
@@ -11788,8 +11788,8 @@
         </p:nvSpPr>
         <p:spPr>
           <a:xfrm>
-            <a:off x="7953375" y="3937406"/>
-            <a:ext cx="1988058" cy="0"/>
+            <a:off x="8118780" y="3838164"/>
+            <a:ext cx="1657248" cy="0"/>
           </a:xfrm>
           <a:prstGeom prst="line">
             <a:avLst/>
@@ -11811,8 +11811,8 @@
         </p:nvSpPr>
         <p:spPr>
           <a:xfrm>
-            <a:off x="7953375" y="3539795"/>
-            <a:ext cx="1988058" cy="0"/>
+            <a:off x="8118780" y="3506714"/>
+            <a:ext cx="1657248" cy="0"/>
           </a:xfrm>
           <a:prstGeom prst="line">
             <a:avLst/>
@@ -11834,8 +11834,8 @@
         </p:nvSpPr>
         <p:spPr>
           <a:xfrm>
-            <a:off x="7953375" y="3142183"/>
-            <a:ext cx="1988058" cy="0"/>
+            <a:off x="8118780" y="3175264"/>
+            <a:ext cx="1657248" cy="0"/>
           </a:xfrm>
           <a:prstGeom prst="line">
             <a:avLst/>
@@ -11857,8 +11857,8 @@
         </p:nvSpPr>
         <p:spPr>
           <a:xfrm>
-            <a:off x="7953375" y="2744572"/>
-            <a:ext cx="1988058" cy="0"/>
+            <a:off x="8118780" y="2843814"/>
+            <a:ext cx="1657248" cy="0"/>
           </a:xfrm>
           <a:prstGeom prst="line">
             <a:avLst/>
@@ -11880,8 +11880,8 @@
         </p:nvSpPr>
         <p:spPr>
           <a:xfrm>
-            <a:off x="7953375" y="2346960"/>
-            <a:ext cx="1988058" cy="0"/>
+            <a:off x="8118780" y="2512365"/>
+            <a:ext cx="1657248" cy="0"/>
           </a:xfrm>
           <a:prstGeom prst="line">
             <a:avLst/>
@@ -11903,8 +11903,8 @@
         </p:nvSpPr>
         <p:spPr>
           <a:xfrm>
-            <a:off x="8350987" y="2744572"/>
-            <a:ext cx="1192835" cy="1192835"/>
+            <a:off x="8450229" y="2843814"/>
+            <a:ext cx="994349" cy="994349"/>
           </a:xfrm>
           <a:custGeom>
             <a:avLst/>
@@ -11913,15 +11913,15 @@
             <a:cxnLst/>
             <a:rect l="l" t="t" r="r" b="b"/>
             <a:pathLst>
-              <a:path w="1192835" h="1192835">
+              <a:path w="994349" h="994349">
                 <a:moveTo>
-                  <a:pt x="0" y="1192835"/>
+                  <a:pt x="0" y="994349"/>
                 </a:moveTo>
                 <a:lnTo>
-                  <a:pt x="1192835" y="1192835"/>
+                  <a:pt x="994349" y="994349"/>
                 </a:lnTo>
                 <a:lnTo>
-                  <a:pt x="1192835" y="0"/>
+                  <a:pt x="994349" y="0"/>
                 </a:lnTo>
                 <a:lnTo>
                   <a:pt x="0" y="0"/>
@@ -11947,7 +11947,7 @@
         </p:nvSpPr>
         <p:spPr>
           <a:xfrm>
-            <a:off x="8565642" y="4014241"/>
+            <a:off x="8565642" y="3914999"/>
             <a:ext cx="763524" cy="349250"/>
           </a:xfrm>
           <a:prstGeom prst="rect">
@@ -11986,7 +11986,7 @@
         </p:nvSpPr>
         <p:spPr>
           <a:xfrm>
-            <a:off x="9592335" y="3166364"/>
+            <a:off x="9493093" y="3166364"/>
             <a:ext cx="763524" cy="349250"/>
           </a:xfrm>
           <a:prstGeom prst="rect">
